--- a/training/decks/t1-present-screen.pptx
+++ b/training/decks/t1-present-screen.pptx
@@ -585,12 +585,27 @@
           </a:p>
           <a:p>
             <a:r>
-              <a:t>Left is the order. The middle is live. The right is Next and Notes, which is where you</a:t>
-            </a:r>
-          </a:p>
-          <a:p>
-            <a:r>
-              <a:t>are reading this. Top right switches the room between the slide, the church logo and black.</a:t>
+              <a:t>The wall is every slide, item by item, in order. The red LIVE card is on air, and the gold</a:t>
+            </a:r>
+          </a:p>
+          <a:p>
+            <a:r>
+              <a:t>NEXT card is what Space shows next. The notes, where you are reading this, sit beside the</a:t>
+            </a:r>
+          </a:p>
+          <a:p>
+            <a:r>
+              <a:t>item on air. The strip on top has a small picture of the main screen, then Next, Previous</a:t>
+            </a:r>
+          </a:p>
+          <a:p>
+            <a:r>
+              <a:t>and Blank. Show, Idle and Blank, top right, switch the room between the slide, the idle</a:t>
+            </a:r>
+          </a:p>
+          <a:p>
+            <a:r>
+              <a:t>screen and black. Press F for Focus to see only the cards; F or Esc brings the rest back.</a:t>
             </a:r>
           </a:p>
         </p:txBody>
@@ -660,12 +675,12 @@
           <a:lstStyle/>
           <a:p>
             <a:r>
-              <a:t>Trainer: Clicking an item in the order only shows it to you. It goes on air when you start</a:t>
-            </a:r>
-          </a:p>
-          <a:p>
-            <a:r>
-              <a:t>it with Enter, or click one of its slides. Space always moves on from what is live.</a:t>
+              <a:t>Trainer: Choosing an item with Shift and Down only shows it to you. It goes on air when you</a:t>
+            </a:r>
+          </a:p>
+          <a:p>
+            <a:r>
+              <a:t>start it with Enter, or click one of its cards. Space always moves on from what is live.</a:t>
             </a:r>
           </a:p>
         </p:txBody>
@@ -4009,7 +4024,7 @@
                 </a:solidFill>
                 <a:latin typeface="Noto Sans"/>
               </a:rPr>
-              <a:t>•  Left: the order of the service</a:t>
+              <a:t>•  The wall: every slide of the service</a:t>
             </a:r>
           </a:p>
           <a:p>
@@ -4025,7 +4040,7 @@
                 </a:solidFill>
                 <a:latin typeface="Noto Sans"/>
               </a:rPr>
-              <a:t>•  Middle, red frame: what the room sees now</a:t>
+              <a:t>•  Red LIVE: what the room sees now</a:t>
             </a:r>
           </a:p>
           <a:p>
@@ -4041,7 +4056,7 @@
                 </a:solidFill>
                 <a:latin typeface="Noto Sans"/>
               </a:rPr>
-              <a:t>•  Right: what comes next, and the notes</a:t>
+              <a:t>•  Gold NEXT: what Space puts up</a:t>
             </a:r>
           </a:p>
           <a:p>
@@ -4057,7 +4072,7 @@
                 </a:solidFill>
                 <a:latin typeface="Noto Sans"/>
               </a:rPr>
-              <a:t>•  Top right: Show, Logo and Blank</a:t>
+              <a:t>•  The strip on top: the main screen and the buttons</a:t>
             </a:r>
           </a:p>
         </p:txBody>

--- a/training/decks/t1-present-screen.pptx
+++ b/training/decks/t1-present-screen.pptx
@@ -590,17 +590,17 @@
           </a:p>
           <a:p>
             <a:r>
-              <a:t>NEXT card is what Space shows next. The notes, where you are reading this, sit beside the</a:t>
-            </a:r>
-          </a:p>
-          <a:p>
-            <a:r>
-              <a:t>item on air. The strip on top has a small picture of the main screen, then Next, Previous</a:t>
-            </a:r>
-          </a:p>
-          <a:p>
-            <a:r>
-              <a:t>and Blank. Show, Idle and Blank, top right, switch the room between the slide, the idle</a:t>
+              <a:t>NEXT card is the next slide. On a slide with builds, Space plays the next build first.</a:t>
+            </a:r>
+          </a:p>
+          <a:p>
+            <a:r>
+              <a:t>The notes, where you are reading this, sit beside the item on air. The strip on top has a</a:t>
+            </a:r>
+          </a:p>
+          <a:p>
+            <a:r>
+              <a:t>small picture of the main screen, then Focus, Quick add, Previous, Next and Blank. Show, Idle and Blank, top right, switch the room between the slide, the idle</a:t>
             </a:r>
           </a:p>
           <a:p>
@@ -675,7 +675,7 @@
           <a:lstStyle/>
           <a:p>
             <a:r>
-              <a:t>Trainer: Choosing an item with Shift and Down only shows it to you. It goes on air when you</a:t>
+              <a:t>Trainer: Choosing an item with Shift and Down only marks it for you. The room sees nothing new. It goes on air when you</a:t>
             </a:r>
           </a:p>
           <a:p>
@@ -4056,7 +4056,7 @@
                 </a:solidFill>
                 <a:latin typeface="Noto Sans"/>
               </a:rPr>
-              <a:t>•  Gold NEXT: what Space puts up</a:t>
+              <a:t>•  Gold NEXT: the next slide</a:t>
             </a:r>
           </a:p>
           <a:p>

--- a/training/decks/t1-present-screen.pptx
+++ b/training/decks/t1-present-screen.pptx
@@ -3803,7 +3803,7 @@
                 </a:solidFill>
                 <a:latin typeface="Noto Sans"/>
               </a:rPr>
-              <a:t>Training 1</a:t>
+              <a:t>Training Session 1</a:t>
             </a:r>
           </a:p>
         </p:txBody>

--- a/training/decks/t1-present-screen.pptx
+++ b/training/decks/t1-present-screen.pptx
@@ -595,17 +595,27 @@
           </a:p>
           <a:p>
             <a:r>
-              <a:t>The notes, where you are reading this, sit beside the item on air. The strip on top has a</a:t>
-            </a:r>
-          </a:p>
-          <a:p>
-            <a:r>
-              <a:t>small picture of the main screen, then Focus, Quick add, Previous, Next and Blank. Show, Idle and Blank, top right, switch the room between the slide, the idle</a:t>
-            </a:r>
-          </a:p>
-          <a:p>
-            <a:r>
-              <a:t>screen and black. Press F for Focus to see only the cards; F or Esc brings the rest back.</a:t>
+              <a:t>The notes, where you are reading this, sit beside the item on air. The right side starts with</a:t>
+            </a:r>
+          </a:p>
+          <a:p>
+            <a:r>
+              <a:t>On air: a picture of the main screen, then Previous, Next and Blank. Under it, Show, Idle and</a:t>
+            </a:r>
+          </a:p>
+          <a:p>
+            <a:r>
+              <a:t>Blank switch the room between the slide, the idle screen and black. Below that are Quick add,</a:t>
+            </a:r>
+          </a:p>
+          <a:p>
+            <a:r>
+              <a:t>the sound, and boxes that fold away: Remotes, Clear and Keys. Press F, or Focus at the top</a:t>
+            </a:r>
+          </a:p>
+          <a:p>
+            <a:r>
+              <a:t>right, to see only the cards; F or Esc brings the rest back.</a:t>
             </a:r>
           </a:p>
         </p:txBody>
@@ -4072,7 +4082,7 @@
                 </a:solidFill>
                 <a:latin typeface="Noto Sans"/>
               </a:rPr>
-              <a:t>•  The strip on top: the main screen and the buttons</a:t>
+              <a:t>•  The right side: the main screen and the buttons</a:t>
             </a:r>
           </a:p>
         </p:txBody>
